--- a/docs/Housing-AgentCore-Leadership.pptx
+++ b/docs/Housing-AgentCore-Leadership.pptx
@@ -1482,7 +1482,7 @@
           <a:p>
             <a:r>
               <a:rPr lang="en-US" dirty="0"/>
-              <a:t>A reproducible, one-command demo stands the stack up, proves 30 checks in ENFORCE — including the live HUD income-limit lookup, the step-two recertify/overpayment workflows, and the no-self-fraud-referral forbid — and tears down with zero residual. The Runtime invoke (housing specialist full workflow, outsider denied) was also proven live.</a:t>
+              <a:t>Two clean-account validation runs are captured in evidence/ and referenced from VALIDATED_RELEASE.md: the full governed pipeline SUCCEEDED end-to-end on live services (HUD, Comprehend, Secrets Manager, Bedrock, WORM, sign-off, exactly-once finalize), and the AgentCore/Cedar gateway attachment reached CREATE_COMPLETE in ENFORCE as pure CDK IaC. Validation surfaced 8 real defects — every one fixed and regression-tested, which is the point of validating. Zero residual on teardown.</a:t>
             </a:r>
             <a:endParaRPr lang="en-US" dirty="0"/>
           </a:p>
@@ -6844,7 +6844,7 @@
                 <a:ea typeface="Calibri" pitchFamily="34" charset="-122"/>
                 <a:cs typeface="Calibri" pitchFamily="34" charset="-120"/>
               </a:rPr>
-              <a:t>Stand up the stack live and walk leadership through the 30-check proof.</a:t>
+              <a:t>Stand up the stack live and walk leadership through the captured validation evidence.</a:t>
             </a:r>
             <a:endParaRPr lang="en-US" sz="1150" dirty="0"/>
           </a:p>
@@ -14856,7 +14856,7 @@
                 <a:ea typeface="Cambria" pitchFamily="34" charset="-122"/>
                 <a:cs typeface="Cambria" pitchFamily="34" charset="-120"/>
               </a:rPr>
-              <a:t>Proof, not slideware: 30 / 30 governance checks, live on AWS</a:t>
+              <a:t>Proof, not slideware: validated live on AWS, evidence captured</a:t>
             </a:r>
             <a:endParaRPr lang="en-US" sz="2700" dirty="0"/>
           </a:p>
@@ -14929,7 +14929,7 @@
                 <a:ea typeface="Cambria" pitchFamily="34" charset="-122"/>
                 <a:cs typeface="Cambria" pitchFamily="34" charset="-120"/>
               </a:rPr>
-              <a:t>30/30</a:t>
+              <a:t>117/117</a:t>
             </a:r>
             <a:endParaRPr lang="en-US" sz="3400" dirty="0"/>
           </a:p>
@@ -14968,7 +14968,7 @@
                 <a:ea typeface="Calibri" pitchFamily="34" charset="-122"/>
                 <a:cs typeface="Calibri" pitchFamily="34" charset="-120"/>
               </a:rPr>
-              <a:t>governance checks pass</a:t>
+              <a:t>automated tests green</a:t>
             </a:r>
             <a:endParaRPr lang="en-US" sz="1150" dirty="0"/>
           </a:p>
@@ -15041,7 +15041,7 @@
                 <a:ea typeface="Cambria" pitchFamily="34" charset="-122"/>
                 <a:cs typeface="Cambria" pitchFamily="34" charset="-120"/>
               </a:rPr>
-              <a:t>6</a:t>
+              <a:t>2</a:t>
             </a:r>
             <a:endParaRPr lang="en-US" sz="3400" dirty="0"/>
           </a:p>
@@ -15080,7 +15080,7 @@
                 <a:ea typeface="Calibri" pitchFamily="34" charset="-122"/>
                 <a:cs typeface="Calibri" pitchFamily="34" charset="-120"/>
               </a:rPr>
-              <a:t>controls native on AgentCore</a:t>
+              <a:t>clean-account live validation runs captured</a:t>
             </a:r>
             <a:endParaRPr lang="en-US" sz="1150" dirty="0"/>
           </a:p>
@@ -15153,7 +15153,7 @@
                 <a:ea typeface="Cambria" pitchFamily="34" charset="-122"/>
                 <a:cs typeface="Cambria" pitchFamily="34" charset="-120"/>
               </a:rPr>
-              <a:t>3</a:t>
+              <a:t>8</a:t>
             </a:r>
             <a:endParaRPr lang="en-US" sz="3400" dirty="0"/>
           </a:p>
@@ -15192,7 +15192,7 @@
                 <a:ea typeface="Calibri" pitchFamily="34" charset="-122"/>
                 <a:cs typeface="Calibri" pitchFamily="34" charset="-120"/>
               </a:rPr>
-              <a:t>regulated controls built &amp; proven</a:t>
+              <a:t>real defects found &amp; fixed by validation</a:t>
             </a:r>
             <a:endParaRPr lang="en-US" sz="1150" dirty="0"/>
           </a:p>
@@ -15377,7 +15377,7 @@
                 <a:ea typeface="Calibri" pitchFamily="34" charset="-122"/>
                 <a:cs typeface="Calibri" pitchFamily="34" charset="-120"/>
               </a:rPr>
-              <a:t>Every one of these ran live, in ENFORCE mode, and each denial names the exact Cedar policy that fired:</a:t>
+              <a:t>Captured in the repo (evidence/), run on the customer deployment path (AWS CDK) and torn down clean:</a:t>
             </a:r>
             <a:endParaRPr lang="en-US" sz="1300" dirty="0"/>
           </a:p>
@@ -15482,7 +15482,7 @@
                 <a:ea typeface="Calibri" pitchFamily="34" charset="-122"/>
                 <a:cs typeface="Calibri" pitchFamily="34" charset="-120"/>
               </a:rPr>
-              <a:t>Deny-by-default — housing specialist ALLOW, outsider DENY</a:t>
+              <a:t>Full governed pipeline SUCCEEDED live — intake to committed determination</a:t>
             </a:r>
             <a:endParaRPr lang="en-US" sz="1200" dirty="0"/>
           </a:p>
@@ -15587,7 +15587,7 @@
                 <a:ea typeface="Calibri" pitchFamily="34" charset="-122"/>
                 <a:cs typeface="Calibri" pitchFamily="34" charset="-120"/>
               </a:rPr>
-              <a:t>Live HUD income-limit lookup with provenance (authoritative)</a:t>
+              <a:t>Live HUD income-limit lookup; provenance signature verified by the workflow</a:t>
             </a:r>
             <a:endParaRPr lang="en-US" sz="1200" dirty="0"/>
           </a:p>
@@ -15692,7 +15692,7 @@
                 <a:ea typeface="Calibri" pitchFamily="34" charset="-122"/>
                 <a:cs typeface="Calibri" pitchFamily="34" charset="-120"/>
               </a:rPr>
-              <a:t>Mask-before-assess &amp; mask-before-draft — un-masked processing forbidden</a:t>
+              <a:t>Real PII masking (Comprehend), cryptographically proven fail-closed downstream</a:t>
             </a:r>
             <a:endParaRPr lang="en-US" sz="1200" dirty="0"/>
           </a:p>
@@ -15797,7 +15797,7 @@
                 <a:ea typeface="Calibri" pitchFamily="34" charset="-122"/>
                 <a:cs typeface="Calibri" pitchFamily="34" charset="-120"/>
               </a:rPr>
-              <a:t>No-self-commit — the agent can't finalize a determination</a:t>
+              <a:t>Deterministic AMI engine; real Bedrock notice through a Guardrail</a:t>
             </a:r>
             <a:endParaRPr lang="en-US" sz="1200" dirty="0"/>
           </a:p>
@@ -15902,7 +15902,7 @@
                 <a:ea typeface="Calibri" pitchFamily="34" charset="-122"/>
                 <a:cs typeface="Calibri" pitchFamily="34" charset="-120"/>
               </a:rPr>
-              <a:t>Real PII masking (Comprehend, fail-closed): name + SSN</a:t>
+              <a:t>Cedar authorization gateway deployed as pure IaC — CREATE_COMPLETE in ENFORCE</a:t>
             </a:r>
             <a:endParaRPr lang="en-US" sz="1200" dirty="0"/>
           </a:p>
@@ -16007,7 +16007,7 @@
                 <a:ea typeface="Calibri" pitchFamily="34" charset="-122"/>
                 <a:cs typeface="Calibri" pitchFamily="34" charset="-120"/>
               </a:rPr>
-              <a:t>Deterministic AMI income-category + targeting engine</a:t>
+              <a:t>No-self-commit — the agent can't finalize; deny-by-default holds</a:t>
             </a:r>
             <a:endParaRPr lang="en-US" sz="1200" dirty="0"/>
           </a:p>
@@ -16112,7 +16112,7 @@
                 <a:ea typeface="Calibri" pitchFamily="34" charset="-122"/>
                 <a:cs typeface="Calibri" pitchFamily="34" charset="-120"/>
               </a:rPr>
-              <a:t>Real Bedrock determination notice through a Guardrail</a:t>
+              <a:t>Human sign-off: approver ≠ requester, approval hash-bound to the exact case</a:t>
             </a:r>
             <a:endParaRPr lang="en-US" sz="1200" dirty="0"/>
           </a:p>
@@ -16217,7 +16217,7 @@
                 <a:ea typeface="Calibri" pitchFamily="34" charset="-122"/>
                 <a:cs typeface="Calibri" pitchFamily="34" charset="-120"/>
               </a:rPr>
-              <a:t>Immutable WORM audit + human sign-off (approver ≠ requester)</a:t>
+              <a:t>Hash-chained WORM audit + exactly-once finalization (replay-safe)</a:t>
             </a:r>
             <a:endParaRPr lang="en-US" sz="1200" dirty="0"/>
           </a:p>

--- a/docs/Housing-AgentCore-Leadership.pptx
+++ b/docs/Housing-AgentCore-Leadership.pptx
@@ -1482,7 +1482,7 @@
           <a:p>
             <a:r>
               <a:rPr lang="en-US" dirty="0"/>
-              <a:t>Two clean-account validation runs are captured in evidence/ and referenced from VALIDATED_RELEASE.md: the full governed pipeline SUCCEEDED end-to-end on live services (HUD, Comprehend, Secrets Manager, Bedrock, WORM, sign-off, exactly-once finalize), and the AgentCore/Cedar gateway attachment reached CREATE_COMPLETE in ENFORCE as pure CDK IaC. Validation surfaced 8 real defects — every one fixed and regression-tested, which is the point of validating. Zero residual on teardown.</a:t>
+              <a:t>Three clean-account validation runs are captured in evidence/ and referenced from VALIDATED_RELEASE.md: the governed pipeline end-to-end on live services; the AgentCore/Cedar gateway as pure IaC in ENFORCE; and a full Gate-B hardening run — private subnets behind a Network Firewall egress allowlist naming only the HUD API, customer-managed KMS everywhere, MFA-required identity with threat protection enforced, tenant pinned and cryptographically stamped, 10 concurrent cases green, a 10-way replay storm committing exactly once, and a PII telemetry canary passing with zero hits in logs/X-Ray/DLQs. Validation surfaced 10 real defects — every one fixed and regression-tested, which is the point of validating. Zero residual on teardown.</a:t>
             </a:r>
             <a:endParaRPr lang="en-US" dirty="0"/>
           </a:p>
@@ -14929,7 +14929,7 @@
                 <a:ea typeface="Cambria" pitchFamily="34" charset="-122"/>
                 <a:cs typeface="Cambria" pitchFamily="34" charset="-120"/>
               </a:rPr>
-              <a:t>117/117</a:t>
+              <a:t>145/145</a:t>
             </a:r>
             <a:endParaRPr lang="en-US" sz="3400" dirty="0"/>
           </a:p>
@@ -15041,7 +15041,7 @@
                 <a:ea typeface="Cambria" pitchFamily="34" charset="-122"/>
                 <a:cs typeface="Cambria" pitchFamily="34" charset="-120"/>
               </a:rPr>
-              <a:t>2</a:t>
+              <a:t>3</a:t>
             </a:r>
             <a:endParaRPr lang="en-US" sz="3400" dirty="0"/>
           </a:p>
@@ -15153,7 +15153,7 @@
                 <a:ea typeface="Cambria" pitchFamily="34" charset="-122"/>
                 <a:cs typeface="Cambria" pitchFamily="34" charset="-120"/>
               </a:rPr>
-              <a:t>8</a:t>
+              <a:t>10</a:t>
             </a:r>
             <a:endParaRPr lang="en-US" sz="3400" dirty="0"/>
           </a:p>
@@ -15482,7 +15482,7 @@
                 <a:ea typeface="Calibri" pitchFamily="34" charset="-122"/>
                 <a:cs typeface="Calibri" pitchFamily="34" charset="-120"/>
               </a:rPr>
-              <a:t>Full governed pipeline SUCCEEDED live — intake to committed determination</a:t>
+              <a:t>Full governed pipeline SUCCEEDED live — including inside a locked-down private network</a:t>
             </a:r>
             <a:endParaRPr lang="en-US" sz="1200" dirty="0"/>
           </a:p>
@@ -15587,7 +15587,7 @@
                 <a:ea typeface="Calibri" pitchFamily="34" charset="-122"/>
                 <a:cs typeface="Calibri" pitchFamily="34" charset="-120"/>
               </a:rPr>
-              <a:t>Live HUD income-limit lookup; provenance signature verified by the workflow</a:t>
+              <a:t>Egress deny-by-default: a firewall allowlist naming ONLY the HUD API — captured live</a:t>
             </a:r>
             <a:endParaRPr lang="en-US" sz="1200" dirty="0"/>
           </a:p>
@@ -15692,7 +15692,7 @@
                 <a:ea typeface="Calibri" pitchFamily="34" charset="-122"/>
                 <a:cs typeface="Calibri" pitchFamily="34" charset="-120"/>
               </a:rPr>
-              <a:t>Real PII masking (Comprehend), cryptographically proven fail-closed downstream</a:t>
+              <a:t>Real PII masking, cryptographically proven; telemetry canary: zero PII in logs/X-Ray</a:t>
             </a:r>
             <a:endParaRPr lang="en-US" sz="1200" dirty="0"/>
           </a:p>
@@ -15797,7 +15797,7 @@
                 <a:ea typeface="Calibri" pitchFamily="34" charset="-122"/>
                 <a:cs typeface="Calibri" pitchFamily="34" charset="-120"/>
               </a:rPr>
-              <a:t>Deterministic AMI engine; real Bedrock notice through a Guardrail</a:t>
+              <a:t>Customer-managed KMS over every store, secret, log, and alert channel — full run under it</a:t>
             </a:r>
             <a:endParaRPr lang="en-US" sz="1200" dirty="0"/>
           </a:p>
@@ -16007,7 +16007,7 @@
                 <a:ea typeface="Calibri" pitchFamily="34" charset="-122"/>
                 <a:cs typeface="Calibri" pitchFamily="34" charset="-120"/>
               </a:rPr>
-              <a:t>No-self-commit — the agent can't finalize; deny-by-default holds</a:t>
+              <a:t>MFA-required identity, threat protection enforced, zero shipped users — captured live</a:t>
             </a:r>
             <a:endParaRPr lang="en-US" sz="1200" dirty="0"/>
           </a:p>
@@ -16112,7 +16112,7 @@
                 <a:ea typeface="Calibri" pitchFamily="34" charset="-122"/>
                 <a:cs typeface="Calibri" pitchFamily="34" charset="-120"/>
               </a:rPr>
-              <a:t>Human sign-off: approver ≠ requester, approval hash-bound to the exact case</a:t>
+              <a:t>10 concurrent cases all succeeded; a 10-way replay storm committed EXACTLY once</a:t>
             </a:r>
             <a:endParaRPr lang="en-US" sz="1200" dirty="0"/>
           </a:p>
@@ -16217,7 +16217,7 @@
                 <a:ea typeface="Calibri" pitchFamily="34" charset="-122"/>
                 <a:cs typeface="Calibri" pitchFamily="34" charset="-120"/>
               </a:rPr>
-              <a:t>Hash-chained WORM audit + exactly-once finalization (replay-safe)</a:t>
+              <a:t>Hash-chained WORM audit; approver ≠ requester, approval hash-bound to the exact case</a:t>
             </a:r>
             <a:endParaRPr lang="en-US" sz="1200" dirty="0"/>
           </a:p>

--- a/docs/Housing-AgentCore-Leadership.pptx
+++ b/docs/Housing-AgentCore-Leadership.pptx
@@ -14929,7 +14929,7 @@
                 <a:ea typeface="Cambria" pitchFamily="34" charset="-122"/>
                 <a:cs typeface="Cambria" pitchFamily="34" charset="-120"/>
               </a:rPr>
-              <a:t>145/145</a:t>
+              <a:t>181/181</a:t>
             </a:r>
             <a:endParaRPr lang="en-US" sz="3400" dirty="0"/>
           </a:p>

--- a/docs/Housing-AgentCore-Leadership.pptx
+++ b/docs/Housing-AgentCore-Leadership.pptx
@@ -14929,7 +14929,7 @@
                 <a:ea typeface="Cambria" pitchFamily="34" charset="-122"/>
                 <a:cs typeface="Cambria" pitchFamily="34" charset="-120"/>
               </a:rPr>
-              <a:t>181/181</a:t>
+              <a:t>238/238</a:t>
             </a:r>
             <a:endParaRPr lang="en-US" sz="3400" dirty="0"/>
           </a:p>
